--- a/m4/diapositivos/aula-06-f06.pptx
+++ b/m4/diapositivos/aula-06-f06.pptx
@@ -14669,7 +14669,7 @@
         <p:spPr>
           <a:xfrm>
             <a:off x="1005840" y="2697480"/>
-            <a:ext cx="0" cy="1581912"/>
+            <a:ext cx="0" cy="1200912"/>
           </a:xfrm>
           <a:prstGeom prst="line">
             <a:avLst/>
@@ -14785,7 +14785,7 @@
                 <a:ea typeface="Arial" pitchFamily="34" charset="-122"/>
                 <a:cs typeface="Arial" pitchFamily="34" charset="-120"/>
               </a:rPr>
-              <a:t>«Abram a porta aos pais», dita pela diretora</a:t>
+              <a:t>«Abram já a porta aos pais», dita pela diretora</a:t>
             </a:r>
             <a:endParaRPr lang="en-US" sz="2400" dirty="0"/>
           </a:p>
@@ -14864,7 +14864,7 @@
         <p:spPr>
           <a:xfrm>
             <a:off x="1417320" y="3124200"/>
-            <a:ext cx="9174175" cy="981456"/>
+            <a:ext cx="9174175" cy="600456"/>
           </a:xfrm>
           <a:prstGeom prst="rect">
             <a:avLst/>
@@ -14893,7 +14893,7 @@
                 <a:ea typeface="Arial" pitchFamily="34" charset="-122"/>
                 <a:cs typeface="Arial" pitchFamily="34" charset="-120"/>
               </a:rPr>
-              <a:t>«Está aberta a reunião de pais», dita pela diretora ao começar</a:t>
+              <a:t>«Está aberta a reunião de pais», dita pela diretora</a:t>
             </a:r>
             <a:endParaRPr lang="en-US" sz="2400" dirty="0"/>
           </a:p>
@@ -14907,7 +14907,7 @@
         </p:nvSpPr>
         <p:spPr>
           <a:xfrm>
-            <a:off x="822960" y="4096512"/>
+            <a:off x="822960" y="3715512"/>
             <a:ext cx="365760" cy="365760"/>
           </a:xfrm>
           <a:prstGeom prst="ellipse">
@@ -14932,7 +14932,7 @@
         </p:nvSpPr>
         <p:spPr>
           <a:xfrm>
-            <a:off x="822960" y="4096512"/>
+            <a:off x="822960" y="3715512"/>
             <a:ext cx="365760" cy="365760"/>
           </a:xfrm>
           <a:prstGeom prst="rect">
@@ -14971,7 +14971,7 @@
         </p:nvSpPr>
         <p:spPr>
           <a:xfrm>
-            <a:off x="1417320" y="4105656"/>
+            <a:off x="1417320" y="3724656"/>
             <a:ext cx="9174175" cy="600456"/>
           </a:xfrm>
           <a:prstGeom prst="rect">
@@ -15001,7 +15001,7 @@
                 <a:ea typeface="Arial" pitchFamily="34" charset="-122"/>
                 <a:cs typeface="Arial" pitchFamily="34" charset="-120"/>
               </a:rPr>
-              <a:t>«Prometo ir à reunião», dita por um pai</a:t>
+              <a:t>«Prometo ir à reunião», dita por um pai à diretora</a:t>
             </a:r>
             <a:endParaRPr lang="en-US" sz="2400" dirty="0"/>
           </a:p>
@@ -15252,7 +15252,7 @@
                 <a:ea typeface="Arial" pitchFamily="34" charset="-122"/>
                 <a:cs typeface="Arial" pitchFamily="34" charset="-120"/>
               </a:rPr>
-              <a:t>«Está aberta a reunião de pais», dita pela diretora ao começar</a:t>
+              <a:t>«Está aberta a reunião de pais», dita pela diretora</a:t>
             </a:r>
             <a:endParaRPr lang="en-US" sz="3400" dirty="0"/>
           </a:p>
